--- a/generated/Tier 1 Broker Scorecards/Appalachian Underwriters_Broker_Scorecard.pptx
+++ b/generated/Tier 1 Broker Scorecards/Appalachian Underwriters_Broker_Scorecard.pptx
@@ -3394,7 +3394,7 @@
                         <a:rPr sz="900">
                           <a:latin typeface="Segoe UI"/>
                         </a:rPr>
-                        <a:t>Tier 1  |  4.51% / 15.00%</a:t>
+                        <a:t>Tier 1  |  4.46% / 15.00%</a:t>
                       </a:r>
                     </a:p>
                   </a:txBody>
@@ -3766,7 +3766,7 @@
                         <a:rPr sz="900">
                           <a:latin typeface="Segoe UI"/>
                         </a:rPr>
-                        <a:t>Non-Fleet Subs: 333  |  Binds: 13</a:t>
+                        <a:t>Non-Fleet Subs: 337  |  Binds: 13</a:t>
                       </a:r>
                     </a:p>
                   </a:txBody>
@@ -4428,7 +4428,7 @@
                           </a:solidFill>
                           <a:latin typeface="Segoe UI"/>
                         </a:rPr>
-                        <a:t>53</a:t>
+                        <a:t>57</a:t>
                       </a:r>
                     </a:p>
                   </a:txBody>
@@ -4707,7 +4707,7 @@
                           </a:solidFill>
                           <a:latin typeface="Segoe UI"/>
                         </a:rPr>
-                        <a:t>3.8%</a:t>
+                        <a:t>3.5%</a:t>
                       </a:r>
                     </a:p>
                   </a:txBody>

--- a/generated/Tier 1 Broker Scorecards/Appalachian Underwriters_Broker_Scorecard.pptx
+++ b/generated/Tier 1 Broker Scorecards/Appalachian Underwriters_Broker_Scorecard.pptx
@@ -3394,7 +3394,7 @@
                         <a:rPr sz="900">
                           <a:latin typeface="Segoe UI"/>
                         </a:rPr>
-                        <a:t>Tier 1  |  4.46% / 15.00%</a:t>
+                        <a:t>Tier 1  |  4.94% / 15.00%</a:t>
                       </a:r>
                     </a:p>
                   </a:txBody>
@@ -3653,7 +3653,7 @@
                         <a:rPr sz="900">
                           <a:latin typeface="Segoe UI"/>
                         </a:rPr>
-                        <a:t>Fleet Subs: 44  |  Binds: 4</a:t>
+                        <a:t>Fleet Subs: 44  |  Binds: 5</a:t>
                       </a:r>
                     </a:p>
                   </a:txBody>
@@ -3690,7 +3690,7 @@
                         <a:rPr sz="900">
                           <a:latin typeface="Segoe UI"/>
                         </a:rPr>
-                        <a:t>Fleet Bound Premium: $335,070.84</a:t>
+                        <a:t>Fleet Bound Premium: $368,079.67</a:t>
                       </a:r>
                     </a:p>
                   </a:txBody>
@@ -3727,7 +3727,7 @@
                         <a:rPr sz="900">
                           <a:latin typeface="Segoe UI"/>
                         </a:rPr>
-                        <a:t>Fleet Book %: 57.5%</a:t>
+                        <a:t>Fleet Book %: 63.2%</a:t>
                       </a:r>
                     </a:p>
                   </a:txBody>
@@ -3766,7 +3766,7 @@
                         <a:rPr sz="900">
                           <a:latin typeface="Segoe UI"/>
                         </a:rPr>
-                        <a:t>Non-Fleet Subs: 337  |  Binds: 13</a:t>
+                        <a:t>Non-Fleet Subs: 341  |  Binds: 14</a:t>
                       </a:r>
                     </a:p>
                   </a:txBody>
@@ -3803,7 +3803,7 @@
                         <a:rPr sz="900">
                           <a:latin typeface="Segoe UI"/>
                         </a:rPr>
-                        <a:t>Non-Fleet Bound Premium: $247,262.36</a:t>
+                        <a:t>Non-Fleet Bound Premium: $214,253.53</a:t>
                       </a:r>
                     </a:p>
                   </a:txBody>
@@ -3840,7 +3840,7 @@
                         <a:rPr sz="900">
                           <a:latin typeface="Segoe UI"/>
                         </a:rPr>
-                        <a:t>Non-Fleet Book %: 42.5%</a:t>
+                        <a:t>Non-Fleet Book %: 36.8%</a:t>
                       </a:r>
                     </a:p>
                   </a:txBody>
@@ -4428,7 +4428,7 @@
                           </a:solidFill>
                           <a:latin typeface="Segoe UI"/>
                         </a:rPr>
-                        <a:t>57</a:t>
+                        <a:t>61</a:t>
                       </a:r>
                     </a:p>
                   </a:txBody>
@@ -4707,7 +4707,7 @@
                           </a:solidFill>
                           <a:latin typeface="Segoe UI"/>
                         </a:rPr>
-                        <a:t>3.5%</a:t>
+                        <a:t>6.6%</a:t>
                       </a:r>
                     </a:p>
                   </a:txBody>
@@ -4983,7 +4983,7 @@
                           </a:solidFill>
                           <a:latin typeface="Segoe UI"/>
                         </a:rPr>
-                        <a:t>2</a:t>
+                        <a:t>4</a:t>
                       </a:r>
                     </a:p>
                   </a:txBody>

--- a/generated/Tier 1 Broker Scorecards/Appalachian Underwriters_Broker_Scorecard.pptx
+++ b/generated/Tier 1 Broker Scorecards/Appalachian Underwriters_Broker_Scorecard.pptx
@@ -3357,7 +3357,7 @@
                         <a:rPr sz="800">
                           <a:latin typeface="Segoe UI"/>
                         </a:rPr>
-                        <a:t>$1,941,720.07 / $1,539,503.87 / $582,333.20</a:t>
+                        <a:t>$1,941,720.07 / $1,555,577.44 / $598,406.77</a:t>
                       </a:r>
                     </a:p>
                   </a:txBody>
@@ -3394,7 +3394,7 @@
                         <a:rPr sz="900">
                           <a:latin typeface="Segoe UI"/>
                         </a:rPr>
-                        <a:t>Tier 1  |  4.94% / 15.00%</a:t>
+                        <a:t>Tier 1  |  4.85% / 15.00%</a:t>
                       </a:r>
                     </a:p>
                   </a:txBody>
@@ -3431,7 +3431,7 @@
                         <a:rPr sz="900">
                           <a:latin typeface="Segoe UI"/>
                         </a:rPr>
-                        <a:t>$2,718,408.10  (21.4% achieved)</a:t>
+                        <a:t>$2,718,408.10  (22.0% achieved)</a:t>
                       </a:r>
                     </a:p>
                   </a:txBody>
@@ -3653,7 +3653,7 @@
                         <a:rPr sz="900">
                           <a:latin typeface="Segoe UI"/>
                         </a:rPr>
-                        <a:t>Fleet Subs: 44  |  Binds: 5</a:t>
+                        <a:t>Fleet Subs: 44  |  Binds: 4</a:t>
                       </a:r>
                     </a:p>
                   </a:txBody>
@@ -3690,7 +3690,7 @@
                         <a:rPr sz="900">
                           <a:latin typeface="Segoe UI"/>
                         </a:rPr>
-                        <a:t>Fleet Bound Premium: $368,079.67</a:t>
+                        <a:t>Fleet Bound Premium: $332,076.86</a:t>
                       </a:r>
                     </a:p>
                   </a:txBody>
@@ -3727,7 +3727,7 @@
                         <a:rPr sz="900">
                           <a:latin typeface="Segoe UI"/>
                         </a:rPr>
-                        <a:t>Fleet Book %: 63.2%</a:t>
+                        <a:t>Fleet Book %: 55.5%</a:t>
                       </a:r>
                     </a:p>
                   </a:txBody>
@@ -3766,7 +3766,7 @@
                         <a:rPr sz="900">
                           <a:latin typeface="Segoe UI"/>
                         </a:rPr>
-                        <a:t>Non-Fleet Subs: 341  |  Binds: 14</a:t>
+                        <a:t>Non-Fleet Subs: 348  |  Binds: 15</a:t>
                       </a:r>
                     </a:p>
                   </a:txBody>
@@ -3803,7 +3803,7 @@
                         <a:rPr sz="900">
                           <a:latin typeface="Segoe UI"/>
                         </a:rPr>
-                        <a:t>Non-Fleet Bound Premium: $214,253.53</a:t>
+                        <a:t>Non-Fleet Bound Premium: $266,329.91</a:t>
                       </a:r>
                     </a:p>
                   </a:txBody>
@@ -3840,7 +3840,7 @@
                         <a:rPr sz="900">
                           <a:latin typeface="Segoe UI"/>
                         </a:rPr>
-                        <a:t>Non-Fleet Book %: 36.8%</a:t>
+                        <a:t>Non-Fleet Book %: 44.5%</a:t>
                       </a:r>
                     </a:p>
                   </a:txBody>
@@ -4428,7 +4428,7 @@
                           </a:solidFill>
                           <a:latin typeface="Segoe UI"/>
                         </a:rPr>
-                        <a:t>61</a:t>
+                        <a:t>68</a:t>
                       </a:r>
                     </a:p>
                   </a:txBody>
@@ -4707,7 +4707,7 @@
                           </a:solidFill>
                           <a:latin typeface="Segoe UI"/>
                         </a:rPr>
-                        <a:t>6.6%</a:t>
+                        <a:t>5.9%</a:t>
                       </a:r>
                     </a:p>
                   </a:txBody>
@@ -5262,7 +5262,7 @@
                           </a:solidFill>
                           <a:latin typeface="Segoe UI"/>
                         </a:rPr>
-                        <a:t>$304</a:t>
+                        <a:t>$16.4K</a:t>
                       </a:r>
                     </a:p>
                   </a:txBody>

--- a/generated/Tier 1 Broker Scorecards/Appalachian Underwriters_Broker_Scorecard.pptx
+++ b/generated/Tier 1 Broker Scorecards/Appalachian Underwriters_Broker_Scorecard.pptx
@@ -3394,7 +3394,7 @@
                         <a:rPr sz="900">
                           <a:latin typeface="Segoe UI"/>
                         </a:rPr>
-                        <a:t>Tier 1  |  4.85% / 15.00%</a:t>
+                        <a:t>Tier 1  |  4.79% / 15.00%</a:t>
                       </a:r>
                     </a:p>
                   </a:txBody>
@@ -3653,7 +3653,7 @@
                         <a:rPr sz="900">
                           <a:latin typeface="Segoe UI"/>
                         </a:rPr>
-                        <a:t>Fleet Subs: 44  |  Binds: 4</a:t>
+                        <a:t>Fleet Subs: 45  |  Binds: 4</a:t>
                       </a:r>
                     </a:p>
                   </a:txBody>
@@ -3766,7 +3766,7 @@
                         <a:rPr sz="900">
                           <a:latin typeface="Segoe UI"/>
                         </a:rPr>
-                        <a:t>Non-Fleet Subs: 348  |  Binds: 15</a:t>
+                        <a:t>Non-Fleet Subs: 352  |  Binds: 15</a:t>
                       </a:r>
                     </a:p>
                   </a:txBody>
@@ -4428,7 +4428,7 @@
                           </a:solidFill>
                           <a:latin typeface="Segoe UI"/>
                         </a:rPr>
-                        <a:t>68</a:t>
+                        <a:t>73</a:t>
                       </a:r>
                     </a:p>
                   </a:txBody>
@@ -4707,7 +4707,7 @@
                           </a:solidFill>
                           <a:latin typeface="Segoe UI"/>
                         </a:rPr>
-                        <a:t>5.9%</a:t>
+                        <a:t>5.5%</a:t>
                       </a:r>
                     </a:p>
                   </a:txBody>

--- a/generated/Tier 1 Broker Scorecards/Appalachian Underwriters_Broker_Scorecard.pptx
+++ b/generated/Tier 1 Broker Scorecards/Appalachian Underwriters_Broker_Scorecard.pptx
@@ -3394,7 +3394,7 @@
                         <a:rPr sz="900">
                           <a:latin typeface="Segoe UI"/>
                         </a:rPr>
-                        <a:t>Tier 1  |  4.79% / 15.00%</a:t>
+                        <a:t>Tier 1  |  4.49% / 15.00%</a:t>
                       </a:r>
                     </a:p>
                   </a:txBody>
@@ -3690,7 +3690,7 @@
                         <a:rPr sz="900">
                           <a:latin typeface="Segoe UI"/>
                         </a:rPr>
-                        <a:t>Fleet Bound Premium: $332,076.86</a:t>
+                        <a:t>Fleet Bound Premium: $364,332.97</a:t>
                       </a:r>
                     </a:p>
                   </a:txBody>
@@ -3727,7 +3727,7 @@
                         <a:rPr sz="900">
                           <a:latin typeface="Segoe UI"/>
                         </a:rPr>
-                        <a:t>Fleet Book %: 55.5%</a:t>
+                        <a:t>Fleet Book %: 60.9%</a:t>
                       </a:r>
                     </a:p>
                   </a:txBody>
@@ -3766,7 +3766,7 @@
                         <a:rPr sz="900">
                           <a:latin typeface="Segoe UI"/>
                         </a:rPr>
-                        <a:t>Non-Fleet Subs: 352  |  Binds: 15</a:t>
+                        <a:t>Non-Fleet Subs: 356  |  Binds: 14</a:t>
                       </a:r>
                     </a:p>
                   </a:txBody>
@@ -3803,7 +3803,7 @@
                         <a:rPr sz="900">
                           <a:latin typeface="Segoe UI"/>
                         </a:rPr>
-                        <a:t>Non-Fleet Bound Premium: $266,329.91</a:t>
+                        <a:t>Non-Fleet Bound Premium: $234,073.80</a:t>
                       </a:r>
                     </a:p>
                   </a:txBody>
@@ -3840,7 +3840,7 @@
                         <a:rPr sz="900">
                           <a:latin typeface="Segoe UI"/>
                         </a:rPr>
-                        <a:t>Non-Fleet Book %: 44.5%</a:t>
+                        <a:t>Non-Fleet Book %: 39.1%</a:t>
                       </a:r>
                     </a:p>
                   </a:txBody>
@@ -4428,7 +4428,7 @@
                           </a:solidFill>
                           <a:latin typeface="Segoe UI"/>
                         </a:rPr>
-                        <a:t>73</a:t>
+                        <a:t>78</a:t>
                       </a:r>
                     </a:p>
                   </a:txBody>
@@ -4707,7 +4707,7 @@
                           </a:solidFill>
                           <a:latin typeface="Segoe UI"/>
                         </a:rPr>
-                        <a:t>5.5%</a:t>
+                        <a:t>5.1%</a:t>
                       </a:r>
                     </a:p>
                   </a:txBody>

--- a/generated/Tier 1 Broker Scorecards/Appalachian Underwriters_Broker_Scorecard.pptx
+++ b/generated/Tier 1 Broker Scorecards/Appalachian Underwriters_Broker_Scorecard.pptx
@@ -3357,7 +3357,7 @@
                         <a:rPr sz="800">
                           <a:latin typeface="Segoe UI"/>
                         </a:rPr>
-                        <a:t>$1,941,720.07 / $1,555,577.44 / $598,406.77</a:t>
+                        <a:t>$1,941,720.07 / $1,653,323.81 / $696,153.14</a:t>
                       </a:r>
                     </a:p>
                   </a:txBody>
@@ -3394,7 +3394,7 @@
                         <a:rPr sz="900">
                           <a:latin typeface="Segoe UI"/>
                         </a:rPr>
-                        <a:t>Tier 1  |  4.49% / 15.00%</a:t>
+                        <a:t>Tier 1  |  4.95% / 15.00%</a:t>
                       </a:r>
                     </a:p>
                   </a:txBody>
@@ -3431,7 +3431,7 @@
                         <a:rPr sz="900">
                           <a:latin typeface="Segoe UI"/>
                         </a:rPr>
-                        <a:t>$2,718,408.10  (22.0% achieved)</a:t>
+                        <a:t>$2,718,408.10  (25.6% achieved)</a:t>
                       </a:r>
                     </a:p>
                   </a:txBody>
@@ -3653,7 +3653,7 @@
                         <a:rPr sz="900">
                           <a:latin typeface="Segoe UI"/>
                         </a:rPr>
-                        <a:t>Fleet Subs: 45  |  Binds: 4</a:t>
+                        <a:t>Fleet Subs: 47  |  Binds: 5</a:t>
                       </a:r>
                     </a:p>
                   </a:txBody>
@@ -3690,7 +3690,7 @@
                         <a:rPr sz="900">
                           <a:latin typeface="Segoe UI"/>
                         </a:rPr>
-                        <a:t>Fleet Bound Premium: $364,332.97</a:t>
+                        <a:t>Fleet Bound Premium: $420,839.31</a:t>
                       </a:r>
                     </a:p>
                   </a:txBody>
@@ -3727,7 +3727,7 @@
                         <a:rPr sz="900">
                           <a:latin typeface="Segoe UI"/>
                         </a:rPr>
-                        <a:t>Fleet Book %: 60.9%</a:t>
+                        <a:t>Fleet Book %: 60.5%</a:t>
                       </a:r>
                     </a:p>
                   </a:txBody>
@@ -3766,7 +3766,7 @@
                         <a:rPr sz="900">
                           <a:latin typeface="Segoe UI"/>
                         </a:rPr>
-                        <a:t>Non-Fleet Subs: 356  |  Binds: 14</a:t>
+                        <a:t>Non-Fleet Subs: 357  |  Binds: 15</a:t>
                       </a:r>
                     </a:p>
                   </a:txBody>
@@ -3803,7 +3803,7 @@
                         <a:rPr sz="900">
                           <a:latin typeface="Segoe UI"/>
                         </a:rPr>
-                        <a:t>Non-Fleet Bound Premium: $234,073.80</a:t>
+                        <a:t>Non-Fleet Bound Premium: $275,313.83</a:t>
                       </a:r>
                     </a:p>
                   </a:txBody>
@@ -3840,7 +3840,7 @@
                         <a:rPr sz="900">
                           <a:latin typeface="Segoe UI"/>
                         </a:rPr>
-                        <a:t>Non-Fleet Book %: 39.1%</a:t>
+                        <a:t>Non-Fleet Book %: 39.5%</a:t>
                       </a:r>
                     </a:p>
                   </a:txBody>
@@ -4428,7 +4428,7 @@
                           </a:solidFill>
                           <a:latin typeface="Segoe UI"/>
                         </a:rPr>
-                        <a:t>78</a:t>
+                        <a:t>81</a:t>
                       </a:r>
                     </a:p>
                   </a:txBody>
@@ -4707,7 +4707,7 @@
                           </a:solidFill>
                           <a:latin typeface="Segoe UI"/>
                         </a:rPr>
-                        <a:t>5.1%</a:t>
+                        <a:t>7.4%</a:t>
                       </a:r>
                     </a:p>
                   </a:txBody>
@@ -4983,7 +4983,7 @@
                           </a:solidFill>
                           <a:latin typeface="Segoe UI"/>
                         </a:rPr>
-                        <a:t>4</a:t>
+                        <a:t>6</a:t>
                       </a:r>
                     </a:p>
                   </a:txBody>
@@ -5262,7 +5262,7 @@
                           </a:solidFill>
                           <a:latin typeface="Segoe UI"/>
                         </a:rPr>
-                        <a:t>$16.4K</a:t>
+                        <a:t>$114.1K</a:t>
                       </a:r>
                     </a:p>
                   </a:txBody>

--- a/generated/Tier 1 Broker Scorecards/Appalachian Underwriters_Broker_Scorecard.pptx
+++ b/generated/Tier 1 Broker Scorecards/Appalachian Underwriters_Broker_Scorecard.pptx
@@ -3394,7 +3394,7 @@
                         <a:rPr sz="900">
                           <a:latin typeface="Segoe UI"/>
                         </a:rPr>
-                        <a:t>Tier 1  |  4.95% / 15.00%</a:t>
+                        <a:t>Tier 1  |  4.91% / 15.00%</a:t>
                       </a:r>
                     </a:p>
                   </a:txBody>
@@ -3766,7 +3766,7 @@
                         <a:rPr sz="900">
                           <a:latin typeface="Segoe UI"/>
                         </a:rPr>
-                        <a:t>Non-Fleet Subs: 357  |  Binds: 15</a:t>
+                        <a:t>Non-Fleet Subs: 360  |  Binds: 15</a:t>
                       </a:r>
                     </a:p>
                   </a:txBody>
@@ -4428,7 +4428,7 @@
                           </a:solidFill>
                           <a:latin typeface="Segoe UI"/>
                         </a:rPr>
-                        <a:t>81</a:t>
+                        <a:t>84</a:t>
                       </a:r>
                     </a:p>
                   </a:txBody>
@@ -4707,7 +4707,7 @@
                           </a:solidFill>
                           <a:latin typeface="Segoe UI"/>
                         </a:rPr>
-                        <a:t>7.4%</a:t>
+                        <a:t>7.1%</a:t>
                       </a:r>
                     </a:p>
                   </a:txBody>

--- a/generated/Tier 1 Broker Scorecards/Appalachian Underwriters_Broker_Scorecard.pptx
+++ b/generated/Tier 1 Broker Scorecards/Appalachian Underwriters_Broker_Scorecard.pptx
@@ -3394,7 +3394,7 @@
                         <a:rPr sz="900">
                           <a:latin typeface="Segoe UI"/>
                         </a:rPr>
-                        <a:t>Tier 1  |  4.91% / 15.00%</a:t>
+                        <a:t>Tier 1  |  4.87% / 15.00%</a:t>
                       </a:r>
                     </a:p>
                   </a:txBody>
@@ -3653,7 +3653,7 @@
                         <a:rPr sz="900">
                           <a:latin typeface="Segoe UI"/>
                         </a:rPr>
-                        <a:t>Fleet Subs: 47  |  Binds: 5</a:t>
+                        <a:t>Fleet Subs: 48  |  Binds: 5</a:t>
                       </a:r>
                     </a:p>
                   </a:txBody>
@@ -3766,7 +3766,7 @@
                         <a:rPr sz="900">
                           <a:latin typeface="Segoe UI"/>
                         </a:rPr>
-                        <a:t>Non-Fleet Subs: 360  |  Binds: 15</a:t>
+                        <a:t>Non-Fleet Subs: 363  |  Binds: 15</a:t>
                       </a:r>
                     </a:p>
                   </a:txBody>
@@ -4428,7 +4428,7 @@
                           </a:solidFill>
                           <a:latin typeface="Segoe UI"/>
                         </a:rPr>
-                        <a:t>84</a:t>
+                        <a:t>88</a:t>
                       </a:r>
                     </a:p>
                   </a:txBody>
@@ -4707,7 +4707,7 @@
                           </a:solidFill>
                           <a:latin typeface="Segoe UI"/>
                         </a:rPr>
-                        <a:t>7.1%</a:t>
+                        <a:t>6.8%</a:t>
                       </a:r>
                     </a:p>
                   </a:txBody>

--- a/generated/Tier 1 Broker Scorecards/Appalachian Underwriters_Broker_Scorecard.pptx
+++ b/generated/Tier 1 Broker Scorecards/Appalachian Underwriters_Broker_Scorecard.pptx
@@ -3394,7 +3394,7 @@
                         <a:rPr sz="900">
                           <a:latin typeface="Segoe UI"/>
                         </a:rPr>
-                        <a:t>Tier 1  |  4.87% / 15.00%</a:t>
+                        <a:t>Tier 1  |  4.80% / 15.00%</a:t>
                       </a:r>
                     </a:p>
                   </a:txBody>
@@ -3653,7 +3653,7 @@
                         <a:rPr sz="900">
                           <a:latin typeface="Segoe UI"/>
                         </a:rPr>
-                        <a:t>Fleet Subs: 48  |  Binds: 5</a:t>
+                        <a:t>Fleet Subs: 49  |  Binds: 5</a:t>
                       </a:r>
                     </a:p>
                   </a:txBody>
@@ -3766,7 +3766,7 @@
                         <a:rPr sz="900">
                           <a:latin typeface="Segoe UI"/>
                         </a:rPr>
-                        <a:t>Non-Fleet Subs: 363  |  Binds: 15</a:t>
+                        <a:t>Non-Fleet Subs: 368  |  Binds: 15</a:t>
                       </a:r>
                     </a:p>
                   </a:txBody>
@@ -4428,7 +4428,7 @@
                           </a:solidFill>
                           <a:latin typeface="Segoe UI"/>
                         </a:rPr>
-                        <a:t>88</a:t>
+                        <a:t>94</a:t>
                       </a:r>
                     </a:p>
                   </a:txBody>
@@ -4707,7 +4707,7 @@
                           </a:solidFill>
                           <a:latin typeface="Segoe UI"/>
                         </a:rPr>
-                        <a:t>6.8%</a:t>
+                        <a:t>6.4%</a:t>
                       </a:r>
                     </a:p>
                   </a:txBody>

--- a/generated/Tier 1 Broker Scorecards/Appalachian Underwriters_Broker_Scorecard.pptx
+++ b/generated/Tier 1 Broker Scorecards/Appalachian Underwriters_Broker_Scorecard.pptx
@@ -3357,7 +3357,7 @@
                         <a:rPr sz="800">
                           <a:latin typeface="Segoe UI"/>
                         </a:rPr>
-                        <a:t>$1,941,720.07 / $1,653,323.81 / $696,153.14</a:t>
+                        <a:t>$1,941,720.07 / $1,317,647.76 / $696,153.14</a:t>
                       </a:r>
                     </a:p>
                   </a:txBody>
@@ -3394,7 +3394,7 @@
                         <a:rPr sz="900">
                           <a:latin typeface="Segoe UI"/>
                         </a:rPr>
-                        <a:t>Tier 1  |  4.80% / 15.00%</a:t>
+                        <a:t>Tier 1  |  4.76% / 15.00%</a:t>
                       </a:r>
                     </a:p>
                   </a:txBody>
@@ -3766,7 +3766,7 @@
                         <a:rPr sz="900">
                           <a:latin typeface="Segoe UI"/>
                         </a:rPr>
-                        <a:t>Non-Fleet Subs: 368  |  Binds: 15</a:t>
+                        <a:t>Non-Fleet Subs: 371  |  Binds: 15</a:t>
                       </a:r>
                     </a:p>
                   </a:txBody>
@@ -4428,7 +4428,7 @@
                           </a:solidFill>
                           <a:latin typeface="Segoe UI"/>
                         </a:rPr>
-                        <a:t>94</a:t>
+                        <a:t>97</a:t>
                       </a:r>
                     </a:p>
                   </a:txBody>
@@ -4707,7 +4707,7 @@
                           </a:solidFill>
                           <a:latin typeface="Segoe UI"/>
                         </a:rPr>
-                        <a:t>6.4%</a:t>
+                        <a:t>6.2%</a:t>
                       </a:r>
                     </a:p>
                   </a:txBody>
